--- a/docs/pitch-decks/regional/pptx/59-ghana-accra.pptx
+++ b/docs/pitch-decks/regional/pptx/59-ghana-accra.pptx
@@ -1814,7 +1814,7 @@
                   <a:srgbClr val="FFFFFF"/>
                 </a:solidFill>
               </a:rPr>
-              <a:t>Ghana - Accra &amp; Capital Markets</a:t>
+              <a:t/>
             </a:r>
             <a:endParaRPr lang="en-US" sz="3600" dirty="0"/>
           </a:p>
@@ -1850,7 +1850,7 @@
                   <a:srgbClr val="8B8FA3"/>
                 </a:solidFill>
               </a:rPr>
-              <a:t>AI Governance for Regulated Financial Institutions</a:t>
+              <a:t>Decision evidence infrastructure for organizations operating in Ghana - Accra</a:t>
             </a:r>
             <a:endParaRPr lang="en-US" sz="1600" dirty="0"/>
           </a:p>
@@ -2161,7 +2161,7 @@
                   <a:srgbClr val="8B8FA3"/>
                 </a:solidFill>
               </a:rPr>
-              <a:t>AI Governance for Regulated Financial Institutions</a:t>
+              <a:t>Decision evidence infrastructure for organizations operating in Ghana - Accra</a:t>
             </a:r>
             <a:endParaRPr lang="en-US" sz="1400" dirty="0"/>
           </a:p>
@@ -2683,7 +2683,7 @@
                   <a:srgbClr val="D4AF37"/>
                 </a:solidFill>
               </a:rPr>
-              <a:t>DORA</a:t>
+              <a:t>AI ADOPTION</a:t>
             </a:r>
             <a:endParaRPr lang="en-US" sz="2800" dirty="0"/>
           </a:p>
@@ -2719,7 +2719,7 @@
                   <a:srgbClr val="8B8FA3"/>
                 </a:solidFill>
               </a:rPr>
-              <a:t>Jan 2025 — AI Operational Resilience</a:t>
+              <a:t>Public institutions and growth-stage enterprises are moving AI into frontline workflows</a:t>
             </a:r>
             <a:endParaRPr lang="en-US" sz="1000" dirty="0"/>
           </a:p>
@@ -2781,7 +2781,7 @@
                   <a:srgbClr val="D4AF37"/>
                 </a:solidFill>
               </a:rPr>
-              <a:t>Basel III</a:t>
+              <a:t>ACCOUNTABILITY</a:t>
             </a:r>
             <a:endParaRPr lang="en-US" sz="2800" dirty="0"/>
           </a:p>
@@ -2817,7 +2817,7 @@
                   <a:srgbClr val="8B8FA3"/>
                 </a:solidFill>
               </a:rPr>
-              <a:t>Auditable Risk Models Required</a:t>
+              <a:t>Cross-border coordination and stakeholder scrutiny are increasing</a:t>
             </a:r>
             <a:endParaRPr lang="en-US" sz="1000" dirty="0"/>
           </a:p>
@@ -2879,7 +2879,7 @@
                   <a:srgbClr val="D4AF37"/>
                 </a:solidFill>
               </a:rPr>
-              <a:t>MiFID II</a:t>
+              <a:t>EXECUTION</a:t>
             </a:r>
             <a:endParaRPr lang="en-US" sz="2800" dirty="0"/>
           </a:p>
@@ -2915,7 +2915,7 @@
                   <a:srgbClr val="8B8FA3"/>
                 </a:solidFill>
               </a:rPr>
-              <a:t>Full Audit Trail for Algo Trading</a:t>
+              <a:t>Leaders need accountable decisions without heavyweight data movement</a:t>
             </a:r>
             <a:endParaRPr lang="en-US" sz="1000" dirty="0"/>
           </a:p>
@@ -3013,7 +3013,7 @@
                   <a:srgbClr val="8B8FA3"/>
                 </a:solidFill>
               </a:rPr>
-              <a:t>AI Platforms w/ Crypto Decision Evidence</a:t>
+              <a:t>Platforms built for decision evidence and flexible deployment</a:t>
             </a:r>
             <a:endParaRPr lang="en-US" sz="1000" dirty="0"/>
           </a:p>
@@ -3225,7 +3225,7 @@
                   <a:srgbClr val="FFFFFF"/>
                 </a:solidFill>
               </a:rPr>
-              <a:t>Banks Deploy AI Without Audit Trails</a:t>
+              <a:t>Organizations across Ghana - Accra are deploying AI without decision evidence</a:t>
             </a:r>
             <a:endParaRPr lang="en-US" sz="2400" dirty="0"/>
           </a:p>
@@ -3265,7 +3265,7 @@
                   <a:srgbClr val="8B8FA3"/>
                 </a:solidFill>
               </a:rPr>
-              <a:t>Credit decisions influenced by AI with no explainability for regulators</a:t>
+              <a:t>AI is moving into high-stakes workflows faster than governance is catching up.</a:t>
             </a:r>
             <a:endParaRPr lang="en-US" sz="1300" dirty="0"/>
           </a:p>
@@ -3283,7 +3283,7 @@
                   <a:srgbClr val="8B8FA3"/>
                 </a:solidFill>
               </a:rPr>
-              <a:t>DORA requires operational resilience documentation for all AI systems by Jan 2025</a:t>
+              <a:t>AI ADOPTION</a:t>
             </a:r>
             <a:endParaRPr lang="en-US" sz="1300" dirty="0"/>
           </a:p>
@@ -3301,7 +3301,7 @@
                   <a:srgbClr val="8B8FA3"/>
                 </a:solidFill>
               </a:rPr>
-              <a:t>Basel III mandates auditable risk models — AI black boxes fail this test</a:t>
+              <a:t>ACCOUNTABILITY</a:t>
             </a:r>
             <a:endParaRPr lang="en-US" sz="1300" dirty="0"/>
           </a:p>
@@ -3319,7 +3319,7 @@
                   <a:srgbClr val="8B8FA3"/>
                 </a:solidFill>
               </a:rPr>
-              <a:t>MiFID II requires full audit trails for algorithmic trading decisions</a:t>
+              <a:t>EXECUTION</a:t>
             </a:r>
             <a:endParaRPr lang="en-US" sz="1300" dirty="0"/>
           </a:p>
@@ -3337,7 +3337,7 @@
                   <a:srgbClr val="8B8FA3"/>
                 </a:solidFill>
               </a:rPr>
-              <a:t>No widely adopted platform provides cryptographically verifiable decision evidence at the decision level</a:t>
+              <a:t>Decision evidence is the missing layer between AI deployment and defensible regional execution.</a:t>
             </a:r>
             <a:endParaRPr lang="en-US" sz="1300" dirty="0"/>
           </a:p>
@@ -3588,7 +3588,7 @@
                   <a:srgbClr val="8B8FA3"/>
                 </a:solidFill>
               </a:rPr>
-              <a:t>Multi-agent deliberation with cryptographic evidence for every credit, trading, and risk decision — regulator-ready proof before the auditor calls.</a:t>
+              <a:t>Datacendia gives teams in Ghana - Accra multi-agent deliberation, full evidence trails, and sovereign deployment for decisions that must stand up to scrutiny.</a:t>
             </a:r>
             <a:endParaRPr lang="en-US" sz="1300" dirty="0"/>
           </a:p>
@@ -3690,7 +3690,7 @@
                   <a:srgbClr val="8B8FA3"/>
                 </a:solidFill>
               </a:rPr>
-              <a:t>Credit decision review with dissent tracking</a:t>
+              <a:t>Regulatory and policy review with preserved dissent</a:t>
             </a:r>
             <a:endParaRPr lang="en-US" sz="1100" dirty="0"/>
           </a:p>
@@ -3708,7 +3708,7 @@
                   <a:srgbClr val="8B8FA3"/>
                 </a:solidFill>
               </a:rPr>
-              <a:t>M&amp;A due diligence with full evidence trail</a:t>
+              <a:t>Vendor, model, and procurement approvals with exportable evidence</a:t>
             </a:r>
             <a:endParaRPr lang="en-US" sz="1100" dirty="0"/>
           </a:p>
@@ -3726,7 +3726,7 @@
                   <a:srgbClr val="8B8FA3"/>
                 </a:solidFill>
               </a:rPr>
-              <a:t>DORA compliance with automated evidence</a:t>
+              <a:t>AI ADOPTION</a:t>
             </a:r>
             <a:endParaRPr lang="en-US" sz="1100" dirty="0"/>
           </a:p>
@@ -3744,7 +3744,7 @@
                   <a:srgbClr val="8B8FA3"/>
                 </a:solidFill>
               </a:rPr>
-              <a:t>Investment committee structured deliberation</a:t>
+              <a:t>Cross-border coordination with accountable approvals and replay</a:t>
             </a:r>
             <a:endParaRPr lang="en-US" sz="1100" dirty="0"/>
           </a:p>
@@ -3762,7 +3762,7 @@
                   <a:srgbClr val="8B8FA3"/>
                 </a:solidFill>
               </a:rPr>
-              <a:t>Regulatory change mapping to P&amp;L impact</a:t>
+              <a:t>Incident response and after-action review in minutes, not weeks</a:t>
             </a:r>
             <a:endParaRPr lang="en-US" sz="1100" dirty="0"/>
           </a:p>
@@ -3938,7 +3938,7 @@
                   <a:srgbClr val="D4AF37"/>
                 </a:solidFill>
               </a:rPr>
-              <a:t>INVESTOR THESIS</a:t>
+              <a:t>REGIONAL OPPORTUNITY</a:t>
             </a:r>
             <a:endParaRPr lang="en-US" sz="1100" dirty="0"/>
           </a:p>
@@ -3974,7 +3974,7 @@
                   <a:srgbClr val="FFFFFF"/>
                 </a:solidFill>
               </a:rPr>
-              <a:t>Why This Is a Compelling Investment</a:t>
+              <a:t>Why Ghana - Accra Matters</a:t>
             </a:r>
             <a:endParaRPr lang="en-US" sz="2400" dirty="0"/>
           </a:p>
@@ -4013,7 +4013,7 @@
                   <a:srgbClr val="8B8FA3"/>
                 </a:solidFill>
               </a:rPr>
-              <a:t>Ghana - Accra is the largest regulated vertical. DORA enforcement creates immediate demand. Only platform providing cryptographic decision evidence — a regulatory requirement with zero incumbent solutions.</a:t>
+              <a:t>AI ADOPTION</a:t>
             </a:r>
             <a:endParaRPr lang="en-US" sz="1300" dirty="0"/>
           </a:p>
@@ -4630,7 +4630,7 @@
                   <a:srgbClr val="8B8FA3"/>
                 </a:solidFill>
               </a:rPr>
-              <a:t>Built the exact data infrastructure that financial institutions need for AI governance — at one of the world's largest asset managers.</a:t>
+              <a:t>Built the data infrastructure and decision workflows required for regulated, high-stakes AI deployments at institutional scale.</a:t>
             </a:r>
             <a:endParaRPr lang="en-US" sz="1200" dirty="0"/>
           </a:p>
